--- a/outputs/ophthalmology-batch-20261011/pediatric/A4_bw_editable.pptx
+++ b/outputs/ophthalmology-batch-20261011/pediatric/A4_bw_editable.pptx
@@ -631,7 +631,7 @@
           <a:p/>
           <a:p>
             <a:r>
-              <a:t>pediatric-09 心率降幅&gt;50%：立即移除斜视钩并暂停；未恢复增强局麻，再无效静推阿托品0.1~0.3 mg，心率正常后继续；由麻醉/心内医师处理。</a:t>
+              <a:t>pediatric-09 心率降幅&gt;50%：立即移除斜视钩并暂停；未恢复增强局麻，再无效静推阿托品0.1~0.3 mg，心率恢复正常后继续；由麻醉/心内医师处理。</a:t>
             </a:r>
           </a:p>
           <a:p>
@@ -759,7 +759,7 @@
           <a:p/>
           <a:p>
             <a:r>
-              <a:t>pediatric-14 外斜术后过矫：伴复视可1~4周交替遮盖；4周仍内斜 → 麻痹验光、远视足矫/必要棱镜，高AC/A双光。连续内斜&gt;6月等情况考虑二次手术/肉毒毒素。</a:t>
+              <a:t>pediatric-14 外斜术后过矫：伴复视可1~4周交替遮盖；4周仍内斜 → 睫状肌麻痹验光、远视足矫/必要棱镜，高AC/A双光。连续内斜&gt;6月等情况考虑二次手术/肉毒毒素。</a:t>
             </a:r>
           </a:p>
           <a:p>
@@ -775,7 +775,7 @@
           <a:p/>
           <a:p>
             <a:r>
-              <a:t>pediatric-15 欠矫处理：外斜欠矫足矫近视/屈光参差、视功能训练；控制好观察，控制差可术后6周二次手术。内斜欠矫麻痹验光、远视足矫/双光及治弱视。</a:t>
+              <a:t>pediatric-15 欠矫处理：外斜欠矫足矫近视/屈光参差、视功能训练；控制好观察，控制差可术后6周二次手术。内斜欠矫睫状肌麻痹验光、远视足矫/双光及治弱视。</a:t>
             </a:r>
           </a:p>
           <a:p>
@@ -823,7 +823,7 @@
           <a:p/>
           <a:p>
             <a:r>
-              <a:t>pediatric-18 肌肉滑脱识别：术后眼位异常、运动受限、扫视减慢应疑滑脱；MRI/回弹试验辅助，术探透见试验阳性确诊；二次寻找实体肌并重固定。</a:t>
+              <a:t>pediatric-18 肌肉滑脱识别：术后眼位异常、运动受限、扫视减慢应疑滑脱；MRI/回弹试验辅助，术中探查透见试验阳性可确诊；二次寻找实体肌并重固定。</a:t>
             </a:r>
           </a:p>
           <a:p>
@@ -4516,7 +4516,7 @@
       </p:sp>
       <p:sp>
         <p:nvSpPr>
-          <p:cNvPr id="15" name="心率降&lt;20%观察；20%~50%稳定按轻度、不稳按重度；&gt;50%移钩暂停，由麻醉/心内处理。"/>
+          <p:cNvPr id="15" name="心率较基线降幅&lt;20%观察；20%~50%稳定按轻度、不稳按重度；&gt;50%移钩暂停，由麻醉/心内处理"/>
           <p:cNvSpPr txBox="1"/>
           <p:nvPr/>
         </p:nvSpPr>
@@ -4556,7 +4556,7 @@
                 <a:ea typeface="Microsoft YaHei"/>
                 <a:cs typeface="Microsoft YaHei"/>
               </a:rPr>
-              <a:t>心率降&lt;20%观察；20%~50%稳定按轻度、不稳按重度；</a:t>
+              <a:t>心率较基线降幅&lt;20%观察；20%~50%稳定按轻度、不稳按</a:t>
             </a:r>
           </a:p>
           <a:p>
@@ -4580,7 +4580,7 @@
                 <a:ea typeface="Microsoft YaHei"/>
                 <a:cs typeface="Microsoft YaHei"/>
               </a:rPr>
-              <a:t>&gt;50%移钩暂停，由麻醉/心内处理。</a:t>
+              <a:t>重度；&gt;50%移钩暂停，由麻醉/心内处理。</a:t>
             </a:r>
           </a:p>
         </p:txBody>
@@ -4726,7 +4726,7 @@
       </p:sp>
       <p:sp>
         <p:nvSpPr>
-          <p:cNvPr id="19" name="暂停后未恢复→增强局麻；仍无效静推阿托品0.1~0.3 mg，正常后继续。勿外推为通用儿童急救剂量。"/>
+          <p:cNvPr id="19" name="暂停后未恢复→增强局麻；仍无效静推阿托品0.1~0.3 mg，心率恢复正常后继续。勿外推为通用儿童急"/>
           <p:cNvSpPr txBox="1"/>
           <p:nvPr/>
         </p:nvSpPr>
@@ -4790,7 +4790,7 @@
                 <a:ea typeface="Microsoft YaHei"/>
                 <a:cs typeface="Microsoft YaHei"/>
               </a:rPr>
-              <a:t>正常后继续。勿外推为通用儿童急救剂量。</a:t>
+              <a:t>心率恢复正常后继续。勿外推为通用儿童急救剂量。</a:t>
             </a:r>
           </a:p>
         </p:txBody>
@@ -5566,7 +5566,7 @@
       </p:sp>
       <p:sp>
         <p:nvSpPr>
-          <p:cNvPr id="35" name="心率降&lt;20%观察；20%~50%稳定按轻度、不稳按重度；&gt;50%移钩暂停，由麻醉/心内处理。"/>
+          <p:cNvPr id="35" name="心率较基线降幅&lt;20%观察；20%~50%稳定按轻度、不稳按重度；&gt;50%移钩暂停，由麻醉/心内处理"/>
           <p:cNvSpPr txBox="1"/>
           <p:nvPr/>
         </p:nvSpPr>
@@ -5606,7 +5606,7 @@
                 <a:ea typeface="Microsoft YaHei"/>
                 <a:cs typeface="Microsoft YaHei"/>
               </a:rPr>
-              <a:t>心率降&lt;20%观察；20%~50%稳定按轻度、不稳按重度；</a:t>
+              <a:t>心率较基线降幅&lt;20%观察；20%~50%稳定按轻度、不稳按</a:t>
             </a:r>
           </a:p>
           <a:p>
@@ -5630,7 +5630,7 @@
                 <a:ea typeface="Microsoft YaHei"/>
                 <a:cs typeface="Microsoft YaHei"/>
               </a:rPr>
-              <a:t>&gt;50%移钩暂停，由麻醉/心内处理。</a:t>
+              <a:t>重度；&gt;50%移钩暂停，由麻醉/心内处理。</a:t>
             </a:r>
           </a:p>
         </p:txBody>
@@ -5776,7 +5776,7 @@
       </p:sp>
       <p:sp>
         <p:nvSpPr>
-          <p:cNvPr id="39" name="暂停后未恢复→增强局麻；仍无效静推阿托品0.1~0.3 mg，正常后继续。勿外推为通用儿童急救剂量。"/>
+          <p:cNvPr id="39" name="暂停后未恢复→增强局麻；仍无效静推阿托品0.1~0.3 mg，心率恢复正常后继续。勿外推为通用儿童急"/>
           <p:cNvSpPr txBox="1"/>
           <p:nvPr/>
         </p:nvSpPr>
@@ -5840,7 +5840,7 @@
                 <a:ea typeface="Microsoft YaHei"/>
                 <a:cs typeface="Microsoft YaHei"/>
               </a:rPr>
-              <a:t>正常后继续。勿外推为通用儿童急救剂量。</a:t>
+              <a:t>心率恢复正常后继续。勿外推为通用儿童急救剂量。</a:t>
             </a:r>
           </a:p>
         </p:txBody>
@@ -6616,7 +6616,7 @@
       </p:sp>
       <p:sp>
         <p:nvSpPr>
-          <p:cNvPr id="55" name="心率降&lt;20%观察；20%~50%稳定按轻度、不稳按重度；&gt;50%移钩暂停，由麻醉/心内处理。"/>
+          <p:cNvPr id="55" name="心率较基线降幅&lt;20%观察；20%~50%稳定按轻度、不稳按重度；&gt;50%移钩暂停，由麻醉/心内处理"/>
           <p:cNvSpPr txBox="1"/>
           <p:nvPr/>
         </p:nvSpPr>
@@ -6656,7 +6656,7 @@
                 <a:ea typeface="Microsoft YaHei"/>
                 <a:cs typeface="Microsoft YaHei"/>
               </a:rPr>
-              <a:t>心率降&lt;20%观察；20%~50%稳定按轻度、不稳按重度；</a:t>
+              <a:t>心率较基线降幅&lt;20%观察；20%~50%稳定按轻度、不稳按</a:t>
             </a:r>
           </a:p>
           <a:p>
@@ -6680,7 +6680,7 @@
                 <a:ea typeface="Microsoft YaHei"/>
                 <a:cs typeface="Microsoft YaHei"/>
               </a:rPr>
-              <a:t>&gt;50%移钩暂停，由麻醉/心内处理。</a:t>
+              <a:t>重度；&gt;50%移钩暂停，由麻醉/心内处理。</a:t>
             </a:r>
           </a:p>
         </p:txBody>
@@ -6826,7 +6826,7 @@
       </p:sp>
       <p:sp>
         <p:nvSpPr>
-          <p:cNvPr id="59" name="暂停后未恢复→增强局麻；仍无效静推阿托品0.1~0.3 mg，正常后继续。勿外推为通用儿童急救剂量。"/>
+          <p:cNvPr id="59" name="暂停后未恢复→增强局麻；仍无效静推阿托品0.1~0.3 mg，心率恢复正常后继续。勿外推为通用儿童急"/>
           <p:cNvSpPr txBox="1"/>
           <p:nvPr/>
         </p:nvSpPr>
@@ -6890,7 +6890,7 @@
                 <a:ea typeface="Microsoft YaHei"/>
                 <a:cs typeface="Microsoft YaHei"/>
               </a:rPr>
-              <a:t>正常后继续。勿外推为通用儿童急救剂量。</a:t>
+              <a:t>心率恢复正常后继续。勿外推为通用儿童急救剂量。</a:t>
             </a:r>
           </a:p>
         </p:txBody>
@@ -7666,7 +7666,7 @@
       </p:sp>
       <p:sp>
         <p:nvSpPr>
-          <p:cNvPr id="75" name="心率降&lt;20%观察；20%~50%稳定按轻度、不稳按重度；&gt;50%移钩暂停，由麻醉/心内处理。"/>
+          <p:cNvPr id="75" name="心率较基线降幅&lt;20%观察；20%~50%稳定按轻度、不稳按重度；&gt;50%移钩暂停，由麻醉/心内处理"/>
           <p:cNvSpPr txBox="1"/>
           <p:nvPr/>
         </p:nvSpPr>
@@ -7706,7 +7706,7 @@
                 <a:ea typeface="Microsoft YaHei"/>
                 <a:cs typeface="Microsoft YaHei"/>
               </a:rPr>
-              <a:t>心率降&lt;20%观察；20%~50%稳定按轻度、不稳按重度；</a:t>
+              <a:t>心率较基线降幅&lt;20%观察；20%~50%稳定按轻度、不稳按</a:t>
             </a:r>
           </a:p>
           <a:p>
@@ -7730,7 +7730,7 @@
                 <a:ea typeface="Microsoft YaHei"/>
                 <a:cs typeface="Microsoft YaHei"/>
               </a:rPr>
-              <a:t>&gt;50%移钩暂停，由麻醉/心内处理。</a:t>
+              <a:t>重度；&gt;50%移钩暂停，由麻醉/心内处理。</a:t>
             </a:r>
           </a:p>
         </p:txBody>
@@ -7876,7 +7876,7 @@
       </p:sp>
       <p:sp>
         <p:nvSpPr>
-          <p:cNvPr id="79" name="暂停后未恢复→增强局麻；仍无效静推阿托品0.1~0.3 mg，正常后继续。勿外推为通用儿童急救剂量。"/>
+          <p:cNvPr id="79" name="暂停后未恢复→增强局麻；仍无效静推阿托品0.1~0.3 mg，心率恢复正常后继续。勿外推为通用儿童急"/>
           <p:cNvSpPr txBox="1"/>
           <p:nvPr/>
         </p:nvSpPr>
@@ -7940,7 +7940,7 @@
                 <a:ea typeface="Microsoft YaHei"/>
                 <a:cs typeface="Microsoft YaHei"/>
               </a:rPr>
-              <a:t>正常后继续。勿外推为通用儿童急救剂量。</a:t>
+              <a:t>心率恢复正常后继续。勿外推为通用儿童急救剂量。</a:t>
             </a:r>
           </a:p>
         </p:txBody>
@@ -8696,7 +8696,7 @@
       </p:sp>
       <p:sp>
         <p:nvSpPr>
-          <p:cNvPr id="11" name="1天、1周、1/3/6月，后每半年；视力、屈光、眼位/运动、头位/双眼视；早期眼压/前节。"/>
+          <p:cNvPr id="11" name="1天、1周、第1、3、6个月，后每半年；视力、屈光、眼位/运动、头位/双眼视；早期眼压/前节。"/>
           <p:cNvSpPr txBox="1"/>
           <p:nvPr/>
         </p:nvSpPr>
@@ -8736,7 +8736,7 @@
                 <a:ea typeface="Microsoft YaHei"/>
                 <a:cs typeface="Microsoft YaHei"/>
               </a:rPr>
-              <a:t>1天、1周、1/3/6月，后每半年；视力、屈光、眼位/运动、</a:t>
+              <a:t>1天、1周、第1、3、6个月，后每半年；视力、屈光、眼位/</a:t>
             </a:r>
           </a:p>
           <a:p>
@@ -8760,7 +8760,7 @@
                 <a:ea typeface="Microsoft YaHei"/>
                 <a:cs typeface="Microsoft YaHei"/>
               </a:rPr>
-              <a:t>头位/双眼视；早期眼压/前节。</a:t>
+              <a:t>运动、头位/双眼视；早期眼压/前节。</a:t>
             </a:r>
           </a:p>
         </p:txBody>
@@ -9770,7 +9770,7 @@
       </p:sp>
       <p:sp>
         <p:nvSpPr>
-          <p:cNvPr id="31" name="1天、1周、1/3/6月，后每半年；视力、屈光、眼位/运动、头位/双眼视；早期眼压/前节。"/>
+          <p:cNvPr id="31" name="1天、1周、第1、3、6个月，后每半年；视力、屈光、眼位/运动、头位/双眼视；早期眼压/前节。"/>
           <p:cNvSpPr txBox="1"/>
           <p:nvPr/>
         </p:nvSpPr>
@@ -9810,7 +9810,7 @@
                 <a:ea typeface="Microsoft YaHei"/>
                 <a:cs typeface="Microsoft YaHei"/>
               </a:rPr>
-              <a:t>1天、1周、1/3/6月，后每半年；视力、屈光、眼位/运动、</a:t>
+              <a:t>1天、1周、第1、3、6个月，后每半年；视力、屈光、眼位/</a:t>
             </a:r>
           </a:p>
           <a:p>
@@ -9834,7 +9834,7 @@
                 <a:ea typeface="Microsoft YaHei"/>
                 <a:cs typeface="Microsoft YaHei"/>
               </a:rPr>
-              <a:t>头位/双眼视；早期眼压/前节。</a:t>
+              <a:t>运动、头位/双眼视；早期眼压/前节。</a:t>
             </a:r>
           </a:p>
         </p:txBody>
@@ -10844,7 +10844,7 @@
       </p:sp>
       <p:sp>
         <p:nvSpPr>
-          <p:cNvPr id="51" name="1天、1周、1/3/6月，后每半年；视力、屈光、眼位/运动、头位/双眼视；早期眼压/前节。"/>
+          <p:cNvPr id="51" name="1天、1周、第1、3、6个月，后每半年；视力、屈光、眼位/运动、头位/双眼视；早期眼压/前节。"/>
           <p:cNvSpPr txBox="1"/>
           <p:nvPr/>
         </p:nvSpPr>
@@ -10884,7 +10884,7 @@
                 <a:ea typeface="Microsoft YaHei"/>
                 <a:cs typeface="Microsoft YaHei"/>
               </a:rPr>
-              <a:t>1天、1周、1/3/6月，后每半年；视力、屈光、眼位/运动、</a:t>
+              <a:t>1天、1周、第1、3、6个月，后每半年；视力、屈光、眼位/</a:t>
             </a:r>
           </a:p>
           <a:p>
@@ -10908,7 +10908,7 @@
                 <a:ea typeface="Microsoft YaHei"/>
                 <a:cs typeface="Microsoft YaHei"/>
               </a:rPr>
-              <a:t>头位/双眼视；早期眼压/前节。</a:t>
+              <a:t>运动、头位/双眼视；早期眼压/前节。</a:t>
             </a:r>
           </a:p>
         </p:txBody>
@@ -11918,7 +11918,7 @@
       </p:sp>
       <p:sp>
         <p:nvSpPr>
-          <p:cNvPr id="71" name="1天、1周、1/3/6月，后每半年；视力、屈光、眼位/运动、头位/双眼视；早期眼压/前节。"/>
+          <p:cNvPr id="71" name="1天、1周、第1、3、6个月，后每半年；视力、屈光、眼位/运动、头位/双眼视；早期眼压/前节。"/>
           <p:cNvSpPr txBox="1"/>
           <p:nvPr/>
         </p:nvSpPr>
@@ -11958,7 +11958,7 @@
                 <a:ea typeface="Microsoft YaHei"/>
                 <a:cs typeface="Microsoft YaHei"/>
               </a:rPr>
-              <a:t>1天、1周、1/3/6月，后每半年；视力、屈光、眼位/运动、</a:t>
+              <a:t>1天、1周、第1、3、6个月，后每半年；视力、屈光、眼位/</a:t>
             </a:r>
           </a:p>
           <a:p>
@@ -11982,7 +11982,7 @@
                 <a:ea typeface="Microsoft YaHei"/>
                 <a:cs typeface="Microsoft YaHei"/>
               </a:rPr>
-              <a:t>头位/双眼视；早期眼压/前节。</a:t>
+              <a:t>运动、头位/双眼视；早期眼压/前节。</a:t>
             </a:r>
           </a:p>
         </p:txBody>
